--- a/writing/decks/03-format-think-turn.pptx
+++ b/writing/decks/03-format-think-turn.pptx
@@ -3181,7 +3181,7 @@
                 </a:solidFill>
                 <a:latin typeface="Consolas"/>
               </a:rPr>
-              <a:t>RATCHET · PART 3 OF 5</a:t>
+              <a:t>RATCHET · PART 3 OF 6</a:t>
             </a:r>
           </a:p>
         </p:txBody>
@@ -3293,7 +3293,7 @@
                 </a:solidFill>
                 <a:latin typeface="Calibri"/>
               </a:rPr>
-              <a:t>Part 3 of 5. Almost everything in the first two pieces traces back to decisions made at the level of a single call to a model — and almost none of it looks like calling Claude's API.</a:t>
+              <a:t>Part 3 of 6. Almost everything in the first two pieces traces back to decisions made at the level of a single call to a model — and almost none of it looks like calling Claude's API.</a:t>
             </a:r>
           </a:p>
         </p:txBody>
@@ -3483,6 +3483,50 @@
         <p:spPr>
           <a:xfrm>
             <a:off x="2148839" y="6263640"/>
+            <a:ext cx="146304" cy="146304"/>
+          </a:xfrm>
+          <a:prstGeom prst="ellipse">
+            <a:avLst/>
+          </a:prstGeom>
+          <a:solidFill>
+            <a:srgbClr val="3A3E44"/>
+          </a:solidFill>
+          <a:ln>
+            <a:noFill/>
+          </a:ln>
+          <a:effectLst/>
+        </p:spPr>
+        <p:style>
+          <a:lnRef idx="1">
+            <a:schemeClr val="accent1"/>
+          </a:lnRef>
+          <a:fillRef idx="3">
+            <a:schemeClr val="accent1"/>
+          </a:fillRef>
+          <a:effectRef idx="2">
+            <a:schemeClr val="accent1"/>
+          </a:effectRef>
+          <a:fontRef idx="minor">
+            <a:schemeClr val="lt1"/>
+          </a:fontRef>
+        </p:style>
+        <p:txBody>
+          <a:bodyPr rtlCol="0" anchor="ctr"/>
+          <a:lstStyle/>
+          <a:p>
+            <a:pPr algn="ctr"/>
+          </a:p>
+        </p:txBody>
+      </p:sp>
+      <p:sp>
+        <p:nvSpPr>
+          <p:cNvPr id="12" name="Oval 11"/>
+          <p:cNvSpPr/>
+          <p:nvPr/>
+        </p:nvSpPr>
+        <p:spPr>
+          <a:xfrm>
+            <a:off x="2468880" y="6263640"/>
             <a:ext cx="146304" cy="146304"/>
           </a:xfrm>
           <a:prstGeom prst="ellipse">
@@ -3862,7 +3906,7 @@
                 </a:solidFill>
                 <a:latin typeface="Consolas"/>
               </a:rPr>
-              <a:t>RATCHET · PART 3/5 · FORMAT, THINK, TURN</a:t>
+              <a:t>RATCHET · PART 3/6 · FORMAT, THINK, TURN</a:t>
             </a:r>
           </a:p>
           <a:p/>
@@ -4254,7 +4298,7 @@
                 </a:solidFill>
                 <a:latin typeface="Consolas"/>
               </a:rPr>
-              <a:t>RATCHET · PART 3/5 · FORMAT, THINK, TURN</a:t>
+              <a:t>RATCHET · PART 3/6 · FORMAT, THINK, TURN</a:t>
             </a:r>
           </a:p>
           <a:p/>
@@ -4829,7 +4873,7 @@
                 </a:solidFill>
                 <a:latin typeface="Consolas"/>
               </a:rPr>
-              <a:t>RATCHET · PART 3/5 · FORMAT, THINK, TURN</a:t>
+              <a:t>RATCHET · PART 3/6 · FORMAT, THINK, TURN</a:t>
             </a:r>
           </a:p>
           <a:p/>
@@ -5153,7 +5197,7 @@
                 </a:solidFill>
                 <a:latin typeface="Consolas"/>
               </a:rPr>
-              <a:t>RATCHET · PART 3/5 · FORMAT, THINK, TURN</a:t>
+              <a:t>RATCHET · PART 3/6 · FORMAT, THINK, TURN</a:t>
             </a:r>
           </a:p>
           <a:p/>
@@ -5536,7 +5580,7 @@
                 </a:solidFill>
                 <a:latin typeface="Consolas"/>
               </a:rPr>
-              <a:t>RATCHET · PART 3/5 · FORMAT, THINK, TURN</a:t>
+              <a:t>RATCHET · PART 3/6 · FORMAT, THINK, TURN</a:t>
             </a:r>
           </a:p>
           <a:p/>
@@ -6129,7 +6173,7 @@
                 </a:solidFill>
                 <a:latin typeface="Consolas"/>
               </a:rPr>
-              <a:t>RATCHET · PART 3/5 · FORMAT, THINK, TURN</a:t>
+              <a:t>RATCHET · PART 3/6 · FORMAT, THINK, TURN</a:t>
             </a:r>
           </a:p>
           <a:p/>
@@ -6549,7 +6593,7 @@
                 </a:solidFill>
                 <a:latin typeface="Consolas"/>
               </a:rPr>
-              <a:t>RATCHET · PART 3/5 · FORMAT, THINK, TURN</a:t>
+              <a:t>RATCHET · PART 3/6 · FORMAT, THINK, TURN</a:t>
             </a:r>
           </a:p>
           <a:p/>
@@ -6978,7 +7022,7 @@
                 </a:solidFill>
                 <a:latin typeface="Consolas"/>
               </a:rPr>
-              <a:t>RATCHET · PART 3/5 · FORMAT, THINK, TURN</a:t>
+              <a:t>RATCHET · PART 3/6 · FORMAT, THINK, TURN</a:t>
             </a:r>
           </a:p>
           <a:p/>
@@ -7287,7 +7331,7 @@
                 </a:solidFill>
                 <a:latin typeface="Consolas"/>
               </a:rPr>
-              <a:t>RATCHET · PART 3/5 · FORMAT, THINK, TURN</a:t>
+              <a:t>RATCHET · PART 3/6 · FORMAT, THINK, TURN</a:t>
             </a:r>
           </a:p>
           <a:p/>
@@ -7725,7 +7769,7 @@
                 </a:solidFill>
                 <a:latin typeface="Consolas"/>
               </a:rPr>
-              <a:t>RATCHET · PART 3/5 · FORMAT, THINK, TURN</a:t>
+              <a:t>RATCHET · PART 3/6 · FORMAT, THINK, TURN</a:t>
             </a:r>
           </a:p>
           <a:p/>
@@ -8108,7 +8152,7 @@
                 </a:solidFill>
                 <a:latin typeface="Consolas"/>
               </a:rPr>
-              <a:t>RATCHET · PART 3/5 · FORMAT, THINK, TURN</a:t>
+              <a:t>RATCHET · PART 3/6 · FORMAT, THINK, TURN</a:t>
             </a:r>
           </a:p>
           <a:p/>
@@ -8432,7 +8476,7 @@
                 </a:solidFill>
                 <a:latin typeface="Consolas"/>
               </a:rPr>
-              <a:t>RATCHET · PART 3/5 · FORMAT, THINK, TURN</a:t>
+              <a:t>RATCHET · PART 3/6 · FORMAT, THINK, TURN</a:t>
             </a:r>
           </a:p>
           <a:p/>
@@ -8754,7 +8798,7 @@
                 </a:solidFill>
                 <a:latin typeface="Consolas"/>
               </a:rPr>
-              <a:t>RATCHET · PART 3/5 · FORMAT, THINK, TURN</a:t>
+              <a:t>RATCHET · PART 3/6 · FORMAT, THINK, TURN</a:t>
             </a:r>
           </a:p>
         </p:txBody>
@@ -9110,7 +9154,7 @@
                 </a:solidFill>
                 <a:latin typeface="Consolas"/>
               </a:rPr>
-              <a:t>RATCHET · PART 3/5 · FORMAT, THINK, TURN</a:t>
+              <a:t>RATCHET · PART 3/6 · FORMAT, THINK, TURN</a:t>
             </a:r>
           </a:p>
           <a:p/>
@@ -9419,7 +9463,7 @@
                 </a:solidFill>
                 <a:latin typeface="Consolas"/>
               </a:rPr>
-              <a:t>RATCHET · PART 3/5 · FORMAT, THINK, TURN</a:t>
+              <a:t>RATCHET · PART 3/6 · FORMAT, THINK, TURN</a:t>
             </a:r>
           </a:p>
           <a:p/>
@@ -9829,7 +9873,7 @@
                 </a:solidFill>
                 <a:latin typeface="Consolas"/>
               </a:rPr>
-              <a:t>RATCHET · PART 3/5 · FORMAT, THINK, TURN</a:t>
+              <a:t>RATCHET · PART 3/6 · FORMAT, THINK, TURN</a:t>
             </a:r>
           </a:p>
           <a:p/>
@@ -10230,7 +10274,7 @@
                 </a:solidFill>
                 <a:latin typeface="Consolas"/>
               </a:rPr>
-              <a:t>RATCHET · PART 3/5 · FORMAT, THINK, TURN</a:t>
+              <a:t>RATCHET · PART 3/6 · FORMAT, THINK, TURN</a:t>
             </a:r>
           </a:p>
           <a:p/>
@@ -10539,7 +10583,7 @@
                 </a:solidFill>
                 <a:latin typeface="Consolas"/>
               </a:rPr>
-              <a:t>RATCHET · PART 3/5 · FORMAT, THINK, TURN</a:t>
+              <a:t>RATCHET · PART 3/6 · FORMAT, THINK, TURN</a:t>
             </a:r>
           </a:p>
           <a:p/>
@@ -10922,7 +10966,7 @@
                 </a:solidFill>
                 <a:latin typeface="Consolas"/>
               </a:rPr>
-              <a:t>RATCHET · PART 3/5 · FORMAT, THINK, TURN</a:t>
+              <a:t>RATCHET · PART 3/6 · FORMAT, THINK, TURN</a:t>
             </a:r>
           </a:p>
           <a:p/>
@@ -11314,7 +11358,7 @@
                 </a:solidFill>
                 <a:latin typeface="Consolas"/>
               </a:rPr>
-              <a:t>RATCHET · PART 3/5 · FORMAT, THINK, TURN</a:t>
+              <a:t>RATCHET · PART 3/6 · FORMAT, THINK, TURN</a:t>
             </a:r>
           </a:p>
           <a:p/>

--- a/writing/decks/03-format-think-turn.pptx
+++ b/writing/decks/03-format-think-turn.pptx
@@ -7725,7 +7725,7 @@
                 </a:solidFill>
                 <a:latin typeface="Calibri"/>
               </a:rPr>
-              <a:t>The deeper fix — </a:t>
+              <a:t>A partial fix already shipped — </a:t>
             </a:r>
             <a:r>
               <a:rPr sz="1350" b="0" i="0">
@@ -7734,7 +7734,7 @@
                 </a:solidFill>
                 <a:latin typeface="Calibri"/>
               </a:rPr>
-              <a:t>parse the verdict correctly, poll less often, use a smaller model — is written up and explicitly deferred, not done.</a:t>
+              <a:t>the monitor's own output is now capped at 256 tokens, which helped. The deeper fix — parse the verdict correctly, poll less often, use a smaller model — is written up and explicitly deferred, not done.</a:t>
             </a:r>
           </a:p>
         </p:txBody>
